--- a/Lab 01/Lab 01 Presentation - Introduction to Digital Forensics.pptx
+++ b/Lab 01/Lab 01 Presentation - Introduction to Digital Forensics.pptx
@@ -517,10 +517,8 @@
           <a:lstStyle/>
           <a:p>
             <a:r>
-              <a:rPr lang="en-US" dirty="0"/>
-              <a:t/>
-            </a:r>
-            <a:endParaRPr lang="en-US" dirty="0"/>
+              <a:t>Welcome to the first lab of the series. Today is about the toolkit, not heavy theory: students leave able to run twelve commands, hash evidence, and repair a broken header. Distribute the working paper BEFORE the session so the pre-lab (section 1.4) is done. Time budget: about 90 minutes for this deck plus live demos.</a:t>
+            </a:r>
           </a:p>
         </p:txBody>
       </p:sp>
@@ -605,10 +603,8 @@
           <a:lstStyle/>
           <a:p>
             <a:r>
-              <a:rPr lang="en-US" dirty="0"/>
-              <a:t/>
-            </a:r>
-            <a:endParaRPr lang="en-US" dirty="0"/>
+              <a:t>Live-response concept: what is running, what is connected. The 'miner' process line is the discussion hook. Mention netstat is legacy and ss is the modern tool (Deep Dive slide 15); deep memory analysis arrives in Lab 07.</a:t>
+            </a:r>
           </a:p>
         </p:txBody>
       </p:sp>
@@ -693,10 +689,8 @@
           <a:lstStyle/>
           <a:p>
             <a:r>
-              <a:rPr lang="en-US" dirty="0"/>
-              <a:t/>
-            </a:r>
-            <a:endParaRPr lang="en-US" dirty="0"/>
+              <a:t>THE integrity slide. If possible run the avalanche demo live: hash a file, append one byte to a copy, hash again - the two hashes share nothing. Hammer the three rules; 'work on copies' is graded in the working paper.</a:t>
+            </a:r>
           </a:p>
         </p:txBody>
       </p:sp>
@@ -781,10 +775,8 @@
           <a:lstStyle/>
           <a:p>
             <a:r>
-              <a:rPr lang="en-US" dirty="0"/>
-              <a:t/>
-            </a:r>
-            <a:endParaRPr lang="en-US" dirty="0"/>
+              <a:t>Reference table for the challenges. Ask which format has an eight-byte signature (PNG - needed in Challenge A). The ZIP row is a teaser: a .docx is a ZIP container, revealed in Lab 03.</a:t>
+            </a:r>
           </a:p>
         </p:txBody>
       </p:sp>
@@ -869,10 +861,8 @@
           <a:lstStyle/>
           <a:p>
             <a:r>
-              <a:rPr lang="en-US" dirty="0"/>
-              <a:t/>
-            </a:r>
-            <a:endParaRPr lang="en-US" dirty="0"/>
+              <a:t>The repair workflow - this is exactly Challenge A, which we solve together in the Deep Dive session. Warn loudly: NEVER edit an original; copy first, hash before and after. hexedit keys: arrows move, F2 saves, Ctrl+C exits.</a:t>
+            </a:r>
           </a:p>
         </p:txBody>
       </p:sp>
@@ -957,10 +947,8 @@
           <a:lstStyle/>
           <a:p>
             <a:r>
-              <a:rPr lang="en-US" dirty="0"/>
-              <a:t/>
-            </a:r>
-            <a:endParaRPr lang="en-US" dirty="0"/>
+              <a:t>Three challenges. A: solved together in the Deep Dive. B and C: solo and graded, flags use ctf{xxxx}, hints are staged in working paper section 4 - encourage students to stop after each hint and retry. Challenge C is grep plus strings on an 8,600-line log.</a:t>
+            </a:r>
           </a:p>
         </p:txBody>
       </p:sp>
@@ -1045,10 +1033,8 @@
           <a:lstStyle/>
           <a:p>
             <a:r>
-              <a:rPr lang="en-US" dirty="0"/>
-              <a:t/>
-            </a:r>
-            <a:endParaRPr lang="en-US" dirty="0"/>
+              <a:t>Introduce evidence numbering NOW: every screenshot or output gets B-01, B-02, and so on, logged in Appendix B. 'No evidence, no answer' is a grading rule, not a slogan. Point them to the exemplar in Appendix B of the working paper.</a:t>
+            </a:r>
           </a:p>
         </p:txBody>
       </p:sp>
@@ -1133,10 +1119,8 @@
           <a:lstStyle/>
           <a:p>
             <a:r>
-              <a:rPr lang="en-US" dirty="0"/>
-              <a:t/>
-            </a:r>
-            <a:endParaRPr lang="en-US" dirty="0"/>
+              <a:t>Recap by asking the class to produce each takeaway before you reveal it. These four lines are the minimum takeaway of the whole lab - if a student can only remember four sentences, these are the four.</a:t>
+            </a:r>
           </a:p>
         </p:txBody>
       </p:sp>
@@ -1221,10 +1205,8 @@
           <a:lstStyle/>
           <a:p>
             <a:r>
-              <a:rPr lang="en-US" dirty="0"/>
-              <a:t/>
-            </a:r>
-            <a:endParaRPr lang="en-US" dirty="0"/>
+              <a:t>Clone command points to the course repo. Preview the next lab: Windows artifacts, same working-paper discipline. Close by collecting working papers and evidence folders, and remind them of the submission naming convention.</a:t>
+            </a:r>
           </a:p>
         </p:txBody>
       </p:sp>
@@ -1309,10 +1291,8 @@
           <a:lstStyle/>
           <a:p>
             <a:r>
-              <a:rPr lang="en-US" dirty="0"/>
-              <a:t/>
-            </a:r>
-            <a:endParaRPr lang="en-US" dirty="0"/>
+              <a:t>Six stops today. Set the contract now: Challenge A is solved together in the Deep Dive session; Challenges B and C are theirs to solve alone. Quick poll: which stop looks hardest? Usually hashing or hex.</a:t>
+            </a:r>
           </a:p>
         </p:txBody>
       </p:sp>
@@ -1397,10 +1377,8 @@
           <a:lstStyle/>
           <a:p>
             <a:r>
-              <a:rPr lang="en-US" dirty="0"/>
-              <a:t/>
-            </a:r>
-            <a:endParaRPr lang="en-US" dirty="0"/>
+              <a:t>Anchor the three-stage process: collect, analyze, present. Before advancing, ask the class for one concrete example of each stage. Common misconception to correct early: forensics is not only about catching hackers - the court-of-law goal shapes how reports are written throughout the course.</a:t>
+            </a:r>
           </a:p>
         </p:txBody>
       </p:sp>
@@ -1485,10 +1463,8 @@
           <a:lstStyle/>
           <a:p>
             <a:r>
-              <a:rPr lang="en-US" dirty="0"/>
-              <a:t/>
-            </a:r>
-            <a:endParaRPr lang="en-US" dirty="0"/>
+              <a:t>Four families of use cases. Tell ONE short story per card instead of reading them all; the web-attack story returns as Lab 04-05 and data recovery as Lab 06. Thirty to forty-five seconds per card is plenty.</a:t>
+            </a:r>
           </a:p>
         </p:txBody>
       </p:sp>
@@ -1573,10 +1549,8 @@
           <a:lstStyle/>
           <a:p>
             <a:r>
-              <a:rPr lang="en-US" dirty="0"/>
-              <a:t/>
-            </a:r>
-            <a:endParaRPr lang="en-US" dirty="0"/>
+              <a:t>The mindset slide. Interaction: 'You visited a website ten minutes ago - name one trace it left.' Collect three or four answers before revealing the right column. The deleted-remnants bullet is the hook for Lab 06.</a:t>
+            </a:r>
           </a:p>
         </p:txBody>
       </p:sp>
@@ -1661,10 +1635,8 @@
           <a:lstStyle/>
           <a:p>
             <a:r>
-              <a:rPr lang="en-US" dirty="0"/>
-              <a:t/>
-            </a:r>
-            <a:endParaRPr lang="en-US" dirty="0"/>
+              <a:t>Do NOT read the table aloud. Say: every family here gets a live drill in the next four slides, and this table is their cheat sheet (mirrored as Appendix A of the working paper). Goal: all twelve commands usable without lookup by the end of the lab.</a:t>
+            </a:r>
           </a:p>
         </p:txBody>
       </p:sp>
@@ -1749,10 +1721,8 @@
           <a:lstStyle/>
           <a:p>
             <a:r>
-              <a:rPr lang="en-US" dirty="0"/>
-              <a:t/>
-            </a:r>
-            <a:endParaRPr lang="en-US" dirty="0"/>
+              <a:t>First drill. Live-demo if possible. The image.jpg-is-ELF example is the star - pause and let students read the output themselves. Common mistakes to flag: forgetting ls -a for dotfiles, and unquoted multi-word patterns in grep.</a:t>
+            </a:r>
           </a:p>
         </p:txBody>
       </p:sp>
@@ -1837,10 +1807,8 @@
           <a:lstStyle/>
           <a:p>
             <a:r>
-              <a:rPr lang="en-US" dirty="0"/>
-              <a:t/>
-            </a:r>
-            <a:endParaRPr lang="en-US" dirty="0"/>
+              <a:t>Emphasize cat is for text files; binaries need strings. The base64 blob is a deliberate teaser for Lab 03 macro analysis. Ask why -n 8 reduces noise (random four-character sequences disappear).</a:t>
+            </a:r>
           </a:p>
         </p:txBody>
       </p:sp>
@@ -1925,10 +1893,8 @@
           <a:lstStyle/>
           <a:p>
             <a:r>
-              <a:rPr lang="en-US" dirty="0"/>
-              <a:t/>
-            </a:r>
-            <a:endParaRPr lang="en-US" dirty="0"/>
+              <a:t>grep is the skill used most across the entire series. Demo grep -c and find -mmin -30 live if you can. Typical error: forgetting quotes around patterns with spaces, e.g. Failed password.</a:t>
+            </a:r>
           </a:p>
         </p:txBody>
       </p:sp>
